--- a/templates/carousels/posts/2026-10-12-mon-field-notes.pptx
+++ b/templates/carousels/posts/2026-10-12-mon-field-notes.pptx
@@ -4805,7 +4805,7 @@
           <a:p>
             <a:pPr algn="r"/>
             <a:r>
-              <a:rPr sz="1950" b="1" i="0">
+              <a:rPr sz="3000" b="1" i="0">
                 <a:solidFill>
                   <a:srgbClr val="156826"/>
                 </a:solidFill>
@@ -4817,7 +4817,7 @@
           <a:p>
             <a:pPr algn="r"/>
             <a:r>
-              <a:rPr sz="1950" b="1" i="0">
+              <a:rPr sz="3000" b="1" i="0">
                 <a:solidFill>
                   <a:srgbClr val="156826"/>
                 </a:solidFill>
@@ -4837,7 +4837,7 @@
         <p:spPr>
           <a:xfrm>
             <a:off x="1238250" y="571500"/>
-            <a:ext cx="3810000" cy="381000"/>
+            <a:ext cx="8096250" cy="381000"/>
           </a:xfrm>
           <a:prstGeom prst="rect">
             <a:avLst/>
@@ -4852,7 +4852,7 @@
           <a:p>
             <a:pPr algn="l"/>
             <a:r>
-              <a:rPr sz="2250" b="1" i="0">
+              <a:rPr sz="3000" b="1" i="0">
                 <a:solidFill>
                   <a:srgbClr val="156826"/>
                 </a:solidFill>
@@ -4891,7 +4891,7 @@
               </a:lnSpc>
             </a:pPr>
             <a:r>
-              <a:rPr sz="4950" b="1" i="0">
+              <a:rPr sz="5700" b="1" i="0">
                 <a:solidFill>
                   <a:srgbClr val="22371F"/>
                 </a:solidFill>
@@ -4926,7 +4926,7 @@
           <a:p>
             <a:pPr algn="l"/>
             <a:r>
-              <a:rPr sz="3450" b="0" i="1">
+              <a:rPr sz="5700" b="0" i="1">
                 <a:solidFill>
                   <a:srgbClr val="156826"/>
                 </a:solidFill>
@@ -4938,7 +4938,7 @@
           <a:p>
             <a:pPr algn="l"/>
             <a:r>
-              <a:rPr sz="3450" b="0" i="1">
+              <a:rPr sz="5700" b="0" i="1">
                 <a:solidFill>
                   <a:srgbClr val="156826"/>
                 </a:solidFill>
@@ -6143,7 +6143,7 @@
           <a:p>
             <a:pPr algn="r"/>
             <a:r>
-              <a:rPr sz="1950" b="1" i="0">
+              <a:rPr sz="3000" b="1" i="0">
                 <a:solidFill>
                   <a:srgbClr val="156826"/>
                 </a:solidFill>
@@ -6155,7 +6155,7 @@
           <a:p>
             <a:pPr algn="r"/>
             <a:r>
-              <a:rPr sz="1950" b="1" i="0">
+              <a:rPr sz="3000" b="1" i="0">
                 <a:solidFill>
                   <a:srgbClr val="156826"/>
                 </a:solidFill>
@@ -6175,7 +6175,7 @@
         <p:spPr>
           <a:xfrm>
             <a:off x="1238250" y="571500"/>
-            <a:ext cx="3810000" cy="381000"/>
+            <a:ext cx="8096250" cy="381000"/>
           </a:xfrm>
           <a:prstGeom prst="rect">
             <a:avLst/>
@@ -6190,7 +6190,7 @@
           <a:p>
             <a:pPr algn="l"/>
             <a:r>
-              <a:rPr sz="2250" b="1" i="0">
+              <a:rPr sz="3000" b="1" i="0">
                 <a:solidFill>
                   <a:srgbClr val="156826"/>
                 </a:solidFill>
@@ -6229,13 +6229,13 @@
               </a:lnSpc>
             </a:pPr>
             <a:r>
-              <a:rPr sz="4800" b="0" i="0">
+              <a:rPr sz="5700" b="0" i="0">
                 <a:solidFill>
                   <a:srgbClr val="22371F"/>
                 </a:solidFill>
                 <a:latin typeface="EB Garamond"/>
               </a:rPr>
-              <a:t>[COPY: Allison] The one question they tested, as a question. Use the graduate's own hypothesis.</a:t>
+              <a:t>[COPY: Allison] The question they tested.</a:t>
             </a:r>
           </a:p>
         </p:txBody>
@@ -7434,7 +7434,7 @@
           <a:p>
             <a:pPr algn="r"/>
             <a:r>
-              <a:rPr sz="1950" b="1" i="0">
+              <a:rPr sz="3000" b="1" i="0">
                 <a:solidFill>
                   <a:srgbClr val="156826"/>
                 </a:solidFill>
@@ -7446,7 +7446,7 @@
           <a:p>
             <a:pPr algn="r"/>
             <a:r>
-              <a:rPr sz="1950" b="1" i="0">
+              <a:rPr sz="3000" b="1" i="0">
                 <a:solidFill>
                   <a:srgbClr val="156826"/>
                 </a:solidFill>
@@ -7466,7 +7466,7 @@
         <p:spPr>
           <a:xfrm>
             <a:off x="1238250" y="571500"/>
-            <a:ext cx="3810000" cy="381000"/>
+            <a:ext cx="8096250" cy="381000"/>
           </a:xfrm>
           <a:prstGeom prst="rect">
             <a:avLst/>
@@ -7481,7 +7481,7 @@
           <a:p>
             <a:pPr algn="l"/>
             <a:r>
-              <a:rPr sz="2250" b="1" i="0">
+              <a:rPr sz="3000" b="1" i="0">
                 <a:solidFill>
                   <a:srgbClr val="156826"/>
                 </a:solidFill>
@@ -7555,13 +7555,13 @@
               </a:lnSpc>
             </a:pPr>
             <a:r>
-              <a:rPr sz="3750" b="0" i="0">
+              <a:rPr sz="5700" b="0" i="0">
                 <a:solidFill>
                   <a:srgbClr val="22371F"/>
                 </a:solidFill>
                 <a:latin typeface="EB Garamond"/>
               </a:rPr>
-              <a:t>[COPY: Allison] Line 1: the plots and what each one got.</a:t>
+              <a:t>[COPY: Allison] Line 1: the plots.</a:t>
             </a:r>
           </a:p>
         </p:txBody>
@@ -7629,13 +7629,13 @@
               </a:lnSpc>
             </a:pPr>
             <a:r>
-              <a:rPr sz="3750" b="0" i="0">
+              <a:rPr sz="5700" b="0" i="0">
                 <a:solidFill>
                   <a:srgbClr val="22371F"/>
                 </a:solidFill>
                 <a:latin typeface="EB Garamond"/>
               </a:rPr>
-              <a:t>[COPY: Allison] Line 2: the control, named.</a:t>
+              <a:t>[COPY: Allison] Line 2: the control.</a:t>
             </a:r>
           </a:p>
         </p:txBody>
@@ -7703,13 +7703,13 @@
               </a:lnSpc>
             </a:pPr>
             <a:r>
-              <a:rPr sz="3750" b="0" i="0">
+              <a:rPr sz="5700" b="0" i="0">
                 <a:solidFill>
                   <a:srgbClr val="22371F"/>
                 </a:solidFill>
                 <a:latin typeface="EB Garamond"/>
               </a:rPr>
-              <a:t>[COPY: Allison] Line 3: what was measured, and when.</a:t>
+              <a:t>[COPY: Allison] Line 3: what was measured.</a:t>
             </a:r>
           </a:p>
         </p:txBody>
@@ -8908,7 +8908,7 @@
           <a:p>
             <a:pPr algn="r"/>
             <a:r>
-              <a:rPr sz="1950" b="1" i="0">
+              <a:rPr sz="3000" b="1" i="0">
                 <a:solidFill>
                   <a:srgbClr val="156826"/>
                 </a:solidFill>
@@ -8920,7 +8920,7 @@
           <a:p>
             <a:pPr algn="r"/>
             <a:r>
-              <a:rPr sz="1950" b="1" i="0">
+              <a:rPr sz="3000" b="1" i="0">
                 <a:solidFill>
                   <a:srgbClr val="156826"/>
                 </a:solidFill>
@@ -8940,7 +8940,7 @@
         <p:spPr>
           <a:xfrm>
             <a:off x="1238250" y="571500"/>
-            <a:ext cx="3810000" cy="381000"/>
+            <a:ext cx="8096250" cy="381000"/>
           </a:xfrm>
           <a:prstGeom prst="rect">
             <a:avLst/>
@@ -8955,7 +8955,7 @@
           <a:p>
             <a:pPr algn="l"/>
             <a:r>
-              <a:rPr sz="2250" b="1" i="0">
+              <a:rPr sz="3000" b="1" i="0">
                 <a:solidFill>
                   <a:srgbClr val="156826"/>
                 </a:solidFill>
@@ -8990,13 +8990,13 @@
           <a:p>
             <a:pPr algn="l"/>
             <a:r>
-              <a:rPr sz="1950" b="1" i="0">
+              <a:rPr sz="3000" b="1" i="0">
                 <a:solidFill>
                   <a:srgbClr val="156826"/>
                 </a:solidFill>
                 <a:latin typeface="Montserrat"/>
               </a:rPr>
-              <a:t>[COPY: Allison] Big number, from the source below.</a:t>
+              <a:t>[COPY: Allison] Big number</a:t>
             </a:r>
           </a:p>
         </p:txBody>
@@ -9010,7 +9010,7 @@
         <p:spPr>
           <a:xfrm>
             <a:off x="1238250" y="2286000"/>
-            <a:ext cx="8096250" cy="2190750"/>
+            <a:ext cx="8096250" cy="1905000"/>
           </a:xfrm>
           <a:prstGeom prst="rect">
             <a:avLst/>
@@ -9025,7 +9025,7 @@
           <a:p>
             <a:pPr algn="l"/>
             <a:r>
-              <a:rPr sz="9750" b="1" i="0">
+              <a:rPr sz="7500" b="1" i="0">
                 <a:solidFill>
                   <a:srgbClr val="156826"/>
                 </a:solidFill>
@@ -9044,8 +9044,8 @@
         </p:nvSpPr>
         <p:spPr>
           <a:xfrm>
-            <a:off x="1238250" y="4953000"/>
-            <a:ext cx="8096250" cy="1143000"/>
+            <a:off x="1238250" y="4476750"/>
+            <a:ext cx="8096250" cy="1524000"/>
           </a:xfrm>
           <a:prstGeom prst="rect">
             <a:avLst/>
@@ -9060,7 +9060,7 @@
           <a:p>
             <a:pPr algn="l"/>
             <a:r>
-              <a:rPr sz="3000" b="0" i="0">
+              <a:rPr sz="5700" b="0" i="0">
                 <a:solidFill>
                   <a:srgbClr val="22371F"/>
                 </a:solidFill>
@@ -9123,8 +9123,8 @@
         </p:nvSpPr>
         <p:spPr>
           <a:xfrm>
-            <a:off x="2190750" y="7810500"/>
-            <a:ext cx="2095500" cy="2476500"/>
+            <a:off x="2190750" y="8382000"/>
+            <a:ext cx="2095500" cy="1905000"/>
           </a:xfrm>
           <a:prstGeom prst="rect">
             <a:avLst/>
@@ -9167,8 +9167,8 @@
         </p:nvSpPr>
         <p:spPr>
           <a:xfrm>
-            <a:off x="5715000" y="5905500"/>
-            <a:ext cx="2095500" cy="4381500"/>
+            <a:off x="5715000" y="7048500"/>
+            <a:ext cx="2095500" cy="3238500"/>
           </a:xfrm>
           <a:prstGeom prst="rect">
             <a:avLst/>
@@ -9227,13 +9227,13 @@
           <a:p>
             <a:pPr algn="ctr"/>
             <a:r>
-              <a:rPr sz="2100" b="1" i="0">
+              <a:rPr sz="3000" b="1" i="0">
                 <a:solidFill>
                   <a:srgbClr val="22371F"/>
                 </a:solidFill>
                 <a:latin typeface="Montserrat"/>
               </a:rPr>
-              <a:t>[COPY: Allison] Control [value]</a:t>
+              <a:t>Control</a:t>
             </a:r>
           </a:p>
         </p:txBody>
@@ -9262,13 +9262,13 @@
           <a:p>
             <a:pPr algn="ctr"/>
             <a:r>
-              <a:rPr sz="2100" b="1" i="0">
+              <a:rPr sz="3000" b="1" i="0">
                 <a:solidFill>
                   <a:srgbClr val="22371F"/>
                 </a:solidFill>
                 <a:latin typeface="Montserrat"/>
               </a:rPr>
-              <a:t>[COPY: Allison] Trial [value]</a:t>
+              <a:t>Trial</a:t>
             </a:r>
           </a:p>
         </p:txBody>
@@ -9297,13 +9297,13 @@
           <a:p>
             <a:pPr algn="l"/>
             <a:r>
-              <a:rPr sz="1950" b="0" i="0">
+              <a:rPr sz="3000" b="0" i="0">
                 <a:solidFill>
                   <a:srgbClr val="6A665C"/>
                 </a:solidFill>
                 <a:latin typeface="Source Sans 3"/>
               </a:rPr>
-              <a:t>[COPY: Allison] Source line: who measured it, where, which year. No source, no number.</a:t>
+              <a:t>[COPY: Allison] Source: who, where, year.</a:t>
             </a:r>
           </a:p>
         </p:txBody>
@@ -10502,7 +10502,7 @@
           <a:p>
             <a:pPr algn="r"/>
             <a:r>
-              <a:rPr sz="1950" b="1" i="0">
+              <a:rPr sz="3000" b="1" i="0">
                 <a:solidFill>
                   <a:srgbClr val="156826"/>
                 </a:solidFill>
@@ -10514,7 +10514,7 @@
           <a:p>
             <a:pPr algn="r"/>
             <a:r>
-              <a:rPr sz="1950" b="1" i="0">
+              <a:rPr sz="3000" b="1" i="0">
                 <a:solidFill>
                   <a:srgbClr val="156826"/>
                 </a:solidFill>
@@ -10534,7 +10534,7 @@
         <p:spPr>
           <a:xfrm>
             <a:off x="1238250" y="571500"/>
-            <a:ext cx="3810000" cy="381000"/>
+            <a:ext cx="8096250" cy="381000"/>
           </a:xfrm>
           <a:prstGeom prst="rect">
             <a:avLst/>
@@ -10549,13 +10549,13 @@
           <a:p>
             <a:pPr algn="l"/>
             <a:r>
-              <a:rPr sz="2250" b="1" i="0">
+              <a:rPr sz="3000" b="1" i="0">
                 <a:solidFill>
                   <a:srgbClr val="156826"/>
                 </a:solidFill>
                 <a:latin typeface="Montserrat"/>
               </a:rPr>
-              <a:t>WHAT SURPRISED THEM</a:t>
+              <a:t>THE SURPRISE</a:t>
             </a:r>
           </a:p>
         </p:txBody>
@@ -10588,13 +10588,13 @@
               </a:lnSpc>
             </a:pPr>
             <a:r>
-              <a:rPr sz="4200" b="0" i="0">
+              <a:rPr sz="5700" b="0" i="0">
                 <a:solidFill>
                   <a:srgbClr val="22371F"/>
                 </a:solidFill>
                 <a:latin typeface="EB Garamond"/>
               </a:rPr>
-              <a:t>[COPY: Allison] What surprised them. Include what disappointed or failed: hail, pests, a plot that came out level. This slide is not optional.</a:t>
+              <a:t>[COPY: Allison] What surprised them, including what disappointed.</a:t>
             </a:r>
           </a:p>
         </p:txBody>
@@ -11793,7 +11793,7 @@
           <a:p>
             <a:pPr algn="r"/>
             <a:r>
-              <a:rPr sz="1950" b="1" i="0">
+              <a:rPr sz="3000" b="1" i="0">
                 <a:solidFill>
                   <a:srgbClr val="156826"/>
                 </a:solidFill>
@@ -11805,7 +11805,7 @@
           <a:p>
             <a:pPr algn="r"/>
             <a:r>
-              <a:rPr sz="1950" b="1" i="0">
+              <a:rPr sz="3000" b="1" i="0">
                 <a:solidFill>
                   <a:srgbClr val="156826"/>
                 </a:solidFill>
@@ -11825,7 +11825,7 @@
         <p:spPr>
           <a:xfrm>
             <a:off x="1238250" y="571500"/>
-            <a:ext cx="3810000" cy="381000"/>
+            <a:ext cx="8096250" cy="381000"/>
           </a:xfrm>
           <a:prstGeom prst="rect">
             <a:avLst/>
@@ -11840,7 +11840,7 @@
           <a:p>
             <a:pPr algn="l"/>
             <a:r>
-              <a:rPr sz="2250" b="1" i="0">
+              <a:rPr sz="3000" b="1" i="0">
                 <a:solidFill>
                   <a:srgbClr val="156826"/>
                 </a:solidFill>
@@ -11919,7 +11919,7 @@
           <a:p>
             <a:pPr algn="ctr"/>
             <a:r>
-              <a:rPr sz="1650" b="1" i="0">
+              <a:rPr sz="3000" b="1" i="0">
                 <a:solidFill>
                   <a:srgbClr val="22371F"/>
                 </a:solidFill>
@@ -11958,7 +11958,7 @@
               </a:lnSpc>
             </a:pPr>
             <a:r>
-              <a:rPr sz="4050" b="1" i="0">
+              <a:rPr sz="3750" b="1" i="0">
                 <a:solidFill>
                   <a:srgbClr val="22371F"/>
                 </a:solidFill>
@@ -11974,7 +11974,7 @@
               </a:lnSpc>
             </a:pPr>
             <a:r>
-              <a:rPr sz="4050" b="1" i="0">
+              <a:rPr sz="3750" b="1" i="0">
                 <a:solidFill>
                   <a:srgbClr val="22371F"/>
                 </a:solidFill>
@@ -11993,7 +11993,7 @@
         </p:nvSpPr>
         <p:spPr>
           <a:xfrm>
-            <a:off x="1238250" y="5905500"/>
+            <a:off x="1238250" y="6286500"/>
             <a:ext cx="8096250" cy="3810000"/>
           </a:xfrm>
           <a:prstGeom prst="rect">
@@ -12013,13 +12013,13 @@
               </a:lnSpc>
             </a:pPr>
             <a:r>
-              <a:rPr sz="3450" b="0" i="0">
+              <a:rPr sz="5700" b="0" i="0">
                 <a:solidFill>
                   <a:srgbClr val="22371F"/>
                 </a:solidFill>
                 <a:latin typeface="EB Garamond"/>
               </a:rPr>
-              <a:t>[COPY: Allison] One or two lines: their ground, their crop, their years growing. Link to the full report if it exists.</a:t>
+              <a:t>[COPY: Allison] Their ground, their crop, their years.</a:t>
             </a:r>
           </a:p>
         </p:txBody>
@@ -12048,7 +12048,7 @@
           <a:p>
             <a:pPr algn="l"/>
             <a:r>
-              <a:rPr sz="2100" b="1" i="0">
+              <a:rPr sz="3000" b="1" i="0">
                 <a:solidFill>
                   <a:srgbClr val="6A665C"/>
                 </a:solidFill>

--- a/templates/carousels/posts/2026-10-12-mon-field-notes.pptx
+++ b/templates/carousels/posts/2026-10-12-mon-field-notes.pptx
@@ -4949,9 +4949,33 @@
           </a:p>
         </p:txBody>
       </p:sp>
-      <p:sp>
-        <p:nvSpPr>
-          <p:cNvPr id="26" name="Oval 25"/>
+      <p:pic>
+        <p:nvPicPr>
+          <p:cNvPr id="26" name="Picture 25" descr="st9004932392259562121.png"/>
+          <p:cNvPicPr>
+            <a:picLocks noChangeAspect="1"/>
+          </p:cNvPicPr>
+          <p:nvPr/>
+        </p:nvPicPr>
+        <p:blipFill>
+          <a:blip r:embed="rId3"/>
+          <a:stretch>
+            <a:fillRect/>
+          </a:stretch>
+        </p:blipFill>
+        <p:spPr>
+          <a:xfrm rot="21120000">
+            <a:off x="5715000" y="8572500"/>
+            <a:ext cx="4419600" cy="3286125"/>
+          </a:xfrm>
+          <a:prstGeom prst="rect">
+            <a:avLst/>
+          </a:prstGeom>
+        </p:spPr>
+      </p:pic>
+      <p:sp>
+        <p:nvSpPr>
+          <p:cNvPr id="27" name="Oval 26"/>
           <p:cNvSpPr/>
           <p:nvPr/>
         </p:nvSpPr>
@@ -4995,7 +5019,7 @@
       </p:sp>
       <p:sp>
         <p:nvSpPr>
-          <p:cNvPr id="27" name="Oval 26"/>
+          <p:cNvPr id="28" name="Oval 27"/>
           <p:cNvSpPr/>
           <p:nvPr/>
         </p:nvSpPr>
@@ -5039,7 +5063,7 @@
       </p:sp>
       <p:sp>
         <p:nvSpPr>
-          <p:cNvPr id="28" name="Oval 27"/>
+          <p:cNvPr id="29" name="Oval 28"/>
           <p:cNvSpPr/>
           <p:nvPr/>
         </p:nvSpPr>
@@ -5083,7 +5107,7 @@
       </p:sp>
       <p:sp>
         <p:nvSpPr>
-          <p:cNvPr id="29" name="Oval 28"/>
+          <p:cNvPr id="30" name="Oval 29"/>
           <p:cNvSpPr/>
           <p:nvPr/>
         </p:nvSpPr>
@@ -5127,7 +5151,7 @@
       </p:sp>
       <p:sp>
         <p:nvSpPr>
-          <p:cNvPr id="30" name="Oval 29"/>
+          <p:cNvPr id="31" name="Oval 30"/>
           <p:cNvSpPr/>
           <p:nvPr/>
         </p:nvSpPr>
@@ -5171,7 +5195,7 @@
       </p:sp>
       <p:sp>
         <p:nvSpPr>
-          <p:cNvPr id="31" name="Oval 30"/>
+          <p:cNvPr id="32" name="Oval 31"/>
           <p:cNvSpPr/>
           <p:nvPr/>
         </p:nvSpPr>
